--- a/public/fun/pack/pptx/familypro/가족소개프리미엄_26_우리부부_버건디샴페인.pptx
+++ b/public/fun/pack/pptx/familypro/가족소개프리미엄_26_우리부부_버건디샴페인.pptx
@@ -113,12 +113,12 @@
   <p:extLst>
     <p:ext uri="{521415D9-36F7-43E2-AB2F-B90AF26B5E84}">
       <p14:sectionLst xmlns:p14="http://schemas.microsoft.com/office/powerpoint/2010/main">
-        <p14:section name="시작" id="{4FBFEEB1-ABB6-4150-BCDD-19504E8023F4}">
+        <p14:section name="시작" id="{2AC62D4F-0306-48E5-9768-5CFC30BACE85}">
           <p14:sldIdLst>
             <p14:sldId id="256"/>
           </p14:sldIdLst>
         </p14:section>
-        <p14:section name="본문" id="{A31EF5C1-6309-49A5-87DC-CFB5640D62B1}">
+        <p14:section name="본문" id="{98CC582F-2E1D-4D68-8978-6A934179AA8E}">
           <p14:sldIdLst>
             <p14:sldId id="257"/>
             <p14:sldId id="258"/>
@@ -127,7 +127,7 @@
             <p14:sldId id="261"/>
           </p14:sldIdLst>
         </p14:section>
-        <p14:section name="마무리" id="{8074511C-3D87-410F-8EAF-66B6CDB17295}">
+        <p14:section name="마무리" id="{7228F741-4770-4A01-8FCB-469F2A24B725}">
           <p14:sldIdLst>
             <p14:sldId id="262"/>
           </p14:sldIdLst>
@@ -1965,7 +1965,7 @@
             </a:lvl1pPr>
           </a:lstStyle>
           <a:p>
-            <a:fld id="{538AEC43-2455-48C5-8B75-CC066D0C256C}" type="slidenum">
+            <a:fld id="{55DBA3F0-15F9-4DDA-9F94-3D2ADDF7BCE5}" type="slidenum">
               <a:rPr lang="en-US"/>
               <a:t>‹#›</a:t>
             </a:fld>
@@ -3149,7 +3149,7 @@
             </a:lvl1pPr>
           </a:lstStyle>
           <a:p>
-            <a:fld id="{93EDC177-8081-434E-AE4D-940C34B10FB5}" type="slidenum">
+            <a:fld id="{0F25C041-2530-4D51-9C2D-5C1C3797C9B2}" type="slidenum">
               <a:rPr lang="en-US"/>
               <a:t>‹#›</a:t>
             </a:fld>
@@ -3902,7 +3902,7 @@
             </a:lvl1pPr>
           </a:lstStyle>
           <a:p>
-            <a:fld id="{3603320C-42E3-43E6-AD29-281755A59037}" type="slidenum">
+            <a:fld id="{EF25D05F-E31A-479B-9D72-17342842878B}" type="slidenum">
               <a:rPr lang="en-US"/>
               <a:t>‹#›</a:t>
             </a:fld>
@@ -4879,7 +4879,7 @@
           <a:p>
             <a:r>
               <a:rPr lang="ko-KR"/>
-              <a:t>우리 부부 · 0000. 00. 00</a:t>
+              <a:t>우리 부부 · 날짜 입력</a:t>
             </a:r>
           </a:p>
         </p:txBody>
@@ -5114,7 +5114,7 @@
           <a:bodyPr/>
           <a:lstStyle/>
           <a:p>
-            <a:fld id="{133F5A37-25B6-440A-844E-C43EB7E791B7}" type="slidenum">
+            <a:fld id="{EA3EA5FB-5B1F-488C-905A-8D116641552F}" type="slidenum">
               <a:rPr lang="en-US"/>
               <a:t>‹#›</a:t>
             </a:fld>
@@ -5570,7 +5570,7 @@
           <a:bodyPr/>
           <a:lstStyle/>
           <a:p>
-            <a:fld id="{51829BDF-A4B8-4317-AFD9-92010B9852F0}" type="slidenum">
+            <a:fld id="{A771D781-389C-4638-9887-9C468F618C55}" type="slidenum">
               <a:rPr lang="en-US"/>
               <a:t>‹#›</a:t>
             </a:fld>
@@ -6545,7 +6545,7 @@
           <a:bodyPr/>
           <a:lstStyle/>
           <a:p>
-            <a:fld id="{BF51CA09-7DD6-4E11-9006-37A02E115ECD}" type="slidenum">
+            <a:fld id="{C64BFF36-D0CF-4C26-84EC-5EE48ABB0BEB}" type="slidenum">
               <a:rPr lang="en-US"/>
               <a:t>‹#›</a:t>
             </a:fld>
@@ -7923,7 +7923,7 @@
           <a:bodyPr/>
           <a:lstStyle/>
           <a:p>
-            <a:fld id="{0D9EC2E4-2CEA-498A-9E4E-948DA77107CA}" type="slidenum">
+            <a:fld id="{5A88DBF4-9D8F-41A9-8F5A-ED7D44367349}" type="slidenum">
               <a:rPr lang="en-US"/>
               <a:t>‹#›</a:t>
             </a:fld>
@@ -8011,7 +8011,7 @@
           <a:bodyPr/>
           <a:lstStyle/>
           <a:p>
-            <a:fld id="{72608C31-FF5E-4D76-8231-B1F289E7453D}" type="slidenum">
+            <a:fld id="{810170FA-6FB0-459E-87F8-7656B62F7D68}" type="slidenum">
               <a:rPr lang="en-US"/>
               <a:t>‹#›</a:t>
             </a:fld>
